--- a/system-design-101/vi/lessons/sd-11-024/slides/sd-11-024.pptx
+++ b/system-design-101/vi/lessons/sd-11-024/slides/sd-11-024.pptx
@@ -1687,7 +1687,7 @@
               <a:t> bốn</a:t>
             </a:r>
             <a:r>
-              <a:rPr lang="en-US" sz="6600" dirty="0" spc="-4" kern="0">
+              <a:rPr lang="en-US" sz="6600" dirty="0" spc="-44" kern="0">
                 <a:solidFill>
                   <a:srgbClr val="F3EEE3"/>
                 </a:solidFill>
@@ -1695,7 +1695,7 @@
                 <a:ea typeface="Bricolage Grotesque ExtraBold" pitchFamily="34" charset="-122"/>
                 <a:cs typeface="Bricolage Grotesque ExtraBold" pitchFamily="34" charset="-120"/>
               </a:rPr>
-              <a:t> bậc,</a:t>
+              <a:t> lớp,</a:t>
             </a:r>
             <a:r>
               <a:rPr lang="en-US" sz="6600" dirty="0" spc="-72" kern="0">
@@ -1966,7 +1966,7 @@
               <a:t>Bốn</a:t>
             </a:r>
             <a:r>
-              <a:rPr lang="en-US" sz="2100" dirty="0" spc="-5" kern="0">
+              <a:rPr lang="en-US" sz="2100" dirty="0" spc="-4" kern="0">
                 <a:solidFill>
                   <a:srgbClr val="9AA0B5"/>
                 </a:solidFill>
@@ -1974,10 +1974,10 @@
                 <a:ea typeface="Be Vietnam Pro" pitchFamily="34" charset="-122"/>
                 <a:cs typeface="Be Vietnam Pro" pitchFamily="34" charset="-120"/>
               </a:rPr>
-              <a:t> bậc,</a:t>
-            </a:r>
-            <a:r>
-              <a:rPr lang="en-US" sz="2100" dirty="0" spc="-23" kern="0">
+              <a:t> lớp</a:t>
+            </a:r>
+            <a:r>
+              <a:rPr lang="en-US" sz="2100" dirty="0" spc="-9" kern="0">
                 <a:solidFill>
                   <a:srgbClr val="9AA0B5"/>
                 </a:solidFill>
@@ -1985,6 +1985,39 @@
                 <a:ea typeface="Be Vietnam Pro" pitchFamily="34" charset="-122"/>
                 <a:cs typeface="Be Vietnam Pro" pitchFamily="34" charset="-120"/>
               </a:rPr>
+              <a:t> bổ</a:t>
+            </a:r>
+            <a:r>
+              <a:rPr lang="en-US" sz="2100" dirty="0" spc="-25" kern="0">
+                <a:solidFill>
+                  <a:srgbClr val="9AA0B5"/>
+                </a:solidFill>
+                <a:latin typeface="Be Vietnam Pro" pitchFamily="34" charset="0"/>
+                <a:ea typeface="Be Vietnam Pro" pitchFamily="34" charset="-122"/>
+                <a:cs typeface="Be Vietnam Pro" pitchFamily="34" charset="-120"/>
+              </a:rPr>
+              <a:t> trợ</a:t>
+            </a:r>
+            <a:r>
+              <a:rPr lang="en-US" sz="2100" dirty="0" spc="0" kern="0">
+                <a:solidFill>
+                  <a:srgbClr val="9AA0B5"/>
+                </a:solidFill>
+                <a:latin typeface="Be Vietnam Pro" pitchFamily="34" charset="0"/>
+                <a:ea typeface="Be Vietnam Pro" pitchFamily="34" charset="-122"/>
+                <a:cs typeface="Be Vietnam Pro" pitchFamily="34" charset="-120"/>
+              </a:rPr>
+              <a:t> nhau,</a:t>
+            </a:r>
+            <a:r>
+              <a:rPr lang="en-US" sz="2100" dirty="0" spc="-24" kern="0">
+                <a:solidFill>
+                  <a:srgbClr val="9AA0B5"/>
+                </a:solidFill>
+                <a:latin typeface="Be Vietnam Pro" pitchFamily="34" charset="0"/>
+                <a:ea typeface="Be Vietnam Pro" pitchFamily="34" charset="-122"/>
+                <a:cs typeface="Be Vietnam Pro" pitchFamily="34" charset="-120"/>
+              </a:rPr>
               <a:t> rồi</a:t>
             </a:r>
             <a:r>
@@ -1999,7 +2032,7 @@
               <a:t> một</a:t>
             </a:r>
             <a:r>
-              <a:rPr lang="en-US" sz="2100" dirty="0" spc="-1" kern="0">
+              <a:rPr lang="en-US" sz="2100" dirty="0" spc="0" kern="0">
                 <a:solidFill>
                   <a:srgbClr val="9AA0B5"/>
                 </a:solidFill>
@@ -2021,7 +2054,7 @@
               <a:t> nghiệm</a:t>
             </a:r>
             <a:r>
-              <a:rPr lang="en-US" sz="2100" dirty="0" spc="-15" kern="0">
+              <a:rPr lang="en-US" sz="2100" dirty="0" spc="-16" kern="0">
                 <a:solidFill>
                   <a:srgbClr val="9AA0B5"/>
                 </a:solidFill>
@@ -8403,7 +8436,7 @@
               <a:t> ngày:</a:t>
             </a:r>
             <a:r>
-              <a:rPr lang="en-US" sz="5400" dirty="0" spc="-6" kern="0">
+              <a:rPr lang="en-US" sz="5400" dirty="0" spc="-34" kern="0">
                 <a:solidFill>
                   <a:srgbClr val="F3EEE3"/>
                 </a:solidFill>
@@ -8411,7 +8444,7 @@
                 <a:ea typeface="Bricolage Grotesque ExtraBold" pitchFamily="34" charset="-122"/>
                 <a:cs typeface="Bricolage Grotesque ExtraBold" pitchFamily="34" charset="-120"/>
               </a:rPr>
-              <a:t> bậc</a:t>
+              <a:t> lớp</a:t>
             </a:r>
             <a:r>
               <a:rPr lang="en-US" sz="5400" dirty="0" spc="-33" kern="0">
@@ -8521,7 +8554,7 @@
               <a:buNone/>
             </a:pPr>
             <a:r>
-              <a:rPr lang="en-US" sz="3000" dirty="0" spc="3" kern="0">
+              <a:rPr lang="en-US" sz="3000" dirty="0" spc="-31" kern="0">
                 <a:solidFill>
                   <a:srgbClr val="F3EEE3"/>
                 </a:solidFill>
@@ -8529,7 +8562,7 @@
                 <a:ea typeface="Be Vietnam Pro SemiBold" pitchFamily="34" charset="-122"/>
                 <a:cs typeface="Be Vietnam Pro SemiBold" pitchFamily="34" charset="-120"/>
               </a:rPr>
-              <a:t>Bậc</a:t>
+              <a:t>Lớp</a:t>
             </a:r>
             <a:r>
               <a:rPr lang="en-US" sz="3000" dirty="0" spc="-2" kern="0">
@@ -8609,7 +8642,7 @@
               <a:t> bằng</a:t>
             </a:r>
             <a:r>
-              <a:rPr lang="en-US" sz="3000" dirty="0" spc="-9" kern="0">
+              <a:rPr lang="en-US" sz="3000" dirty="0" spc="-8" kern="0">
                 <a:solidFill>
                   <a:srgbClr val="F3EEE3"/>
                 </a:solidFill>
@@ -8876,7 +8909,7 @@
               <a:t>GitOps</a:t>
             </a:r>
             <a:r>
-              <a:rPr lang="en-US" sz="2700" dirty="0" spc="-8" kern="0">
+              <a:rPr lang="en-US" sz="2700" dirty="0" spc="26" kern="0">
                 <a:solidFill>
                   <a:srgbClr val="FFB454"/>
                 </a:solidFill>
@@ -8884,10 +8917,10 @@
                 <a:ea typeface="Be Vietnam Pro SemiBold" pitchFamily="34" charset="-122"/>
                 <a:cs typeface="Be Vietnam Pro SemiBold" pitchFamily="34" charset="-120"/>
               </a:rPr>
-              <a:t> có</a:t>
-            </a:r>
-            <a:r>
-              <a:rPr lang="en-US" sz="2700" dirty="0" spc="-4" kern="0">
+              <a:t> đi</a:t>
+            </a:r>
+            <a:r>
+              <a:rPr lang="en-US" sz="2700" dirty="0" spc="-19" kern="0">
                 <a:solidFill>
                   <a:srgbClr val="FFB454"/>
                 </a:solidFill>
@@ -8895,10 +8928,10 @@
                 <a:ea typeface="Be Vietnam Pro SemiBold" pitchFamily="34" charset="-122"/>
                 <a:cs typeface="Be Vietnam Pro SemiBold" pitchFamily="34" charset="-120"/>
               </a:rPr>
-              <a:t> ích</a:t>
-            </a:r>
-            <a:r>
-              <a:rPr lang="en-US" sz="2700" dirty="0" spc="-2" kern="0">
+              <a:t> tốt</a:t>
+            </a:r>
+            <a:r>
+              <a:rPr lang="en-US" sz="2700" dirty="0" spc="-1" kern="0">
                 <a:solidFill>
                   <a:srgbClr val="FFB454"/>
                 </a:solidFill>
@@ -8906,7 +8939,7 @@
                 <a:ea typeface="Be Vietnam Pro SemiBold" pitchFamily="34" charset="-122"/>
                 <a:cs typeface="Be Vietnam Pro SemiBold" pitchFamily="34" charset="-120"/>
               </a:rPr>
-              <a:t> sau</a:t>
+              <a:t> cùng</a:t>
             </a:r>
             <a:r>
               <a:rPr lang="en-US" sz="2700" dirty="0" spc="-3" kern="0">
@@ -8917,10 +8950,10 @@
                 <a:ea typeface="Be Vietnam Pro SemiBold" pitchFamily="34" charset="-122"/>
                 <a:cs typeface="Be Vietnam Pro SemiBold" pitchFamily="34" charset="-120"/>
               </a:rPr>
-              <a:t> khi</a:t>
-            </a:r>
-            <a:r>
-              <a:rPr lang="en-US" sz="2700" dirty="0" spc="8" kern="0">
+              <a:t> IaC,</a:t>
+            </a:r>
+            <a:r>
+              <a:rPr lang="en-US" sz="2700" dirty="0" spc="-6" kern="0">
                 <a:solidFill>
                   <a:srgbClr val="FFB454"/>
                 </a:solidFill>
@@ -8928,10 +8961,10 @@
                 <a:ea typeface="Be Vietnam Pro SemiBold" pitchFamily="34" charset="-122"/>
                 <a:cs typeface="Be Vietnam Pro SemiBold" pitchFamily="34" charset="-120"/>
               </a:rPr>
-              <a:t> đã</a:t>
-            </a:r>
-            <a:r>
-              <a:rPr lang="en-US" sz="2700" dirty="0" spc="-7" kern="0">
+              <a:t> không</a:t>
+            </a:r>
+            <a:r>
+              <a:rPr lang="en-US" sz="2700" dirty="0" spc="-14" kern="0">
                 <a:solidFill>
                   <a:srgbClr val="FFB454"/>
                 </a:solidFill>
@@ -8939,10 +8972,10 @@
                 <a:ea typeface="Be Vietnam Pro SemiBold" pitchFamily="34" charset="-122"/>
                 <a:cs typeface="Be Vietnam Pro SemiBold" pitchFamily="34" charset="-120"/>
               </a:rPr>
-              <a:t> có</a:t>
-            </a:r>
-            <a:r>
-              <a:rPr lang="en-US" sz="2700" dirty="0" spc="-2" kern="0">
+              <a:t> bắt</a:t>
+            </a:r>
+            <a:r>
+              <a:rPr lang="en-US" sz="2700" dirty="0" spc="-4" kern="0">
                 <a:solidFill>
                   <a:srgbClr val="FFB454"/>
                 </a:solidFill>
@@ -8950,7 +8983,29 @@
                 <a:ea typeface="Be Vietnam Pro SemiBold" pitchFamily="34" charset="-122"/>
                 <a:cs typeface="Be Vietnam Pro SemiBold" pitchFamily="34" charset="-120"/>
               </a:rPr>
-              <a:t> IaC.</a:t>
+              <a:t> buộc</a:t>
+            </a:r>
+            <a:r>
+              <a:rPr lang="en-US" sz="2700" dirty="0" spc="26" kern="0">
+                <a:solidFill>
+                  <a:srgbClr val="FFB454"/>
+                </a:solidFill>
+                <a:latin typeface="Be Vietnam Pro SemiBold" pitchFamily="34" charset="0"/>
+                <a:ea typeface="Be Vietnam Pro SemiBold" pitchFamily="34" charset="-122"/>
+                <a:cs typeface="Be Vietnam Pro SemiBold" pitchFamily="34" charset="-120"/>
+              </a:rPr>
+              <a:t> đứng</a:t>
+            </a:r>
+            <a:r>
+              <a:rPr lang="en-US" sz="2700" dirty="0" spc="-2" kern="0">
+                <a:solidFill>
+                  <a:srgbClr val="FFB454"/>
+                </a:solidFill>
+                <a:latin typeface="Be Vietnam Pro SemiBold" pitchFamily="34" charset="0"/>
+                <a:ea typeface="Be Vietnam Pro SemiBold" pitchFamily="34" charset="-122"/>
+                <a:cs typeface="Be Vietnam Pro SemiBold" pitchFamily="34" charset="-120"/>
+              </a:rPr>
+              <a:t> sau.</a:t>
             </a:r>
             <a:endParaRPr lang="en-US" sz="2700" dirty="0"/>
           </a:p>
